--- a/curso_es/pptx/S78.pptx
+++ b/curso_es/pptx/S78.pptx
@@ -3821,7 +3821,7 @@
                 </a:solidFill>
                 <a:latin typeface="Fredoka"/>
               </a:rPr>
-              <a:t>Caso 1 · Tres amigos de Chen</a:t>
+              <a:t>Caso 1 · Tres amistades distintas</a:t>
             </a:r>
           </a:p>
         </p:txBody>
@@ -3903,7 +3903,7 @@
                 </a:solidFill>
                 <a:latin typeface="Nunito Sans"/>
               </a:rPr>
-              <a:t>Chen se sienta con Dylan porque Dylan le deja los apuntes. Con Omar juega al Fortnite. Con Naiara habla de todo desde primaria. (Ejemplo inventado.)</a:t>
+              <a:t>Un chico se sienta con un compañero porque le deja los apuntes. Con otro juega al Fortnite. Con una amiga habla de todo desde primaria. (Ejemplo inventado.)</a:t>
             </a:r>
           </a:p>
         </p:txBody>
@@ -3951,7 +3951,7 @@
                 </a:solidFill>
                 <a:latin typeface="Nunito Sans"/>
               </a:rPr>
-              <a:t>Dylan: le sirve para los apuntes. Amistad por </a:t>
+              <a:t>El primero: le sirve para los apuntes. Amistad por </a:t>
             </a:r>
             <a:r>
               <a:rPr sz="2400" b="1">
@@ -3994,7 +3994,7 @@
                 </a:solidFill>
                 <a:latin typeface="Nunito Sans"/>
               </a:rPr>
-              <a:t>Omar: lo pasan bien jugando. Amistad por </a:t>
+              <a:t>El segundo: lo pasan bien jugando. Amistad por </a:t>
             </a:r>
             <a:r>
               <a:rPr sz="2400" b="1">
@@ -4037,7 +4037,7 @@
                 </a:solidFill>
                 <a:latin typeface="Nunito Sans"/>
               </a:rPr>
-              <a:t>Naiara: se quieren por cómo son, desde hace años. Se parece a la amistad por </a:t>
+              <a:t>La amiga: se quieren por cómo son, desde hace años. Se parece a la amistad por </a:t>
             </a:r>
             <a:r>
               <a:rPr sz="2400" b="1">
@@ -4266,7 +4266,7 @@
                 </a:solidFill>
                 <a:latin typeface="Nunito Sans"/>
               </a:rPr>
-              <a:t>En el grupo de WhatsApp, la cuadrilla de Leire se ríe de una chica nueva. Leire no quiere, pero piensa: «Si no me río, me dejan fuera». (Ejemplo inventado.)</a:t>
+              <a:t>La cuadrilla de una chica se ríe en el grupo de un árbitro que se equivocó. Ella no quiere, pero piensa: «Si no me río, me dejan fuera». (Ejemplo inventado.)</a:t>
             </a:r>
           </a:p>
         </p:txBody>
@@ -4611,7 +4611,7 @@
                 </a:solidFill>
                 <a:latin typeface="Nunito Sans"/>
               </a:rPr>
-              <a:t>Iker quiere que Aitor le diga a su madre que ayer estudiaron juntos. En realidad, Iker se fue al Casco Viejo. «Si eres mi amigo, me cubres». (Ejemplo inventado.)</a:t>
+              <a:t>Un chico quiere que un amigo le diga a su madre que ayer estudiaron juntos. En realidad, se fue al Casco Viejo. «Si eres mi amigo, me cubres». (Ejemplo inventado.)</a:t>
             </a:r>
           </a:p>
         </p:txBody>
@@ -4659,7 +4659,7 @@
                 </a:solidFill>
                 <a:latin typeface="Nunito Sans"/>
               </a:rPr>
-              <a:t>Si Aitor dice que no, ¿es un mal amigo?</a:t>
+              <a:t>Si el amigo dice que no, ¿es un mal amigo?</a:t>
             </a:r>
           </a:p>
           <a:p>
@@ -6337,7 +6337,7 @@
                 </a:solidFill>
                 <a:latin typeface="Nunito Sans"/>
               </a:rPr>
-              <a:t>Iker tiene 600 seguidores en Instagram y un grupo de WhatsApp con 30 personas de la cuadrilla.</a:t>
+              <a:t>Un chico tiene 600 seguidores en Instagram y un grupo de WhatsApp con 30 personas de la cuadrilla.</a:t>
             </a:r>
           </a:p>
         </p:txBody>
